--- a/slides/slide-04.pptx
+++ b/slides/slide-04.pptx
@@ -4519,8 +4519,8 @@
         </p:blipFill>
         <p:spPr>
           <a:xfrm xmlns:a="http://schemas.openxmlformats.org/drawingml/2006/main">
-            <a:off x="619125" y="571500"/>
-            <a:ext cx="4933950" cy="723900"/>
+            <a:off x="609600" y="609600"/>
+            <a:ext cx="5372100" cy="788185"/>
           </a:xfrm>
           <a:prstGeom xmlns:a="http://schemas.openxmlformats.org/drawingml/2006/main" prst="rect">
             <a:avLst/>
@@ -4546,8 +4546,8 @@
         </p:nvSpPr>
         <p:spPr>
           <a:xfrm xmlns:a="http://schemas.openxmlformats.org/drawingml/2006/main">
-            <a:off x="628560" y="1752480"/>
-            <a:ext cx="10572480" cy="609120"/>
+            <a:off x="609600" y="1752600"/>
+            <a:ext cx="10972800" cy="533400"/>
           </a:xfrm>
           <a:prstGeom xmlns:a="http://schemas.openxmlformats.org/drawingml/2006/main" prst="rect">
             <a:avLst/>
@@ -4568,80 +4568,80 @@
             <a:noAutofit/>
           </a:bodyPr>
           <a:lstStyle xmlns:a="http://schemas.openxmlformats.org/drawingml/2006/main">
-            <a:defPPr>
-              <a:defRPr>
+            <a:defPPr algn="l">
+              <a:defRPr sz="2700">
                 <a:latin typeface="HarmonyOS Sans SC"/>
                 <a:ea typeface="HarmonyOS Sans SC"/>
                 <a:cs typeface="HarmonyOS Sans SC"/>
               </a:defRPr>
             </a:defPPr>
-            <a:lvl1pPr>
-              <a:buNone/>
-              <a:defRPr>
+            <a:lvl1pPr algn="l">
+              <a:buNone/>
+              <a:defRPr sz="2700">
                 <a:latin typeface="HarmonyOS Sans SC"/>
                 <a:ea typeface="HarmonyOS Sans SC"/>
                 <a:cs typeface="HarmonyOS Sans SC"/>
               </a:defRPr>
             </a:lvl1pPr>
-            <a:lvl2pPr>
-              <a:buNone/>
-              <a:defRPr>
+            <a:lvl2pPr algn="l">
+              <a:buNone/>
+              <a:defRPr sz="2700">
                 <a:latin typeface="HarmonyOS Sans SC"/>
                 <a:ea typeface="HarmonyOS Sans SC"/>
                 <a:cs typeface="HarmonyOS Sans SC"/>
               </a:defRPr>
             </a:lvl2pPr>
-            <a:lvl3pPr>
-              <a:buNone/>
-              <a:defRPr>
+            <a:lvl3pPr algn="l">
+              <a:buNone/>
+              <a:defRPr sz="2700">
                 <a:latin typeface="HarmonyOS Sans SC"/>
                 <a:ea typeface="HarmonyOS Sans SC"/>
                 <a:cs typeface="HarmonyOS Sans SC"/>
               </a:defRPr>
             </a:lvl3pPr>
-            <a:lvl4pPr>
-              <a:buNone/>
-              <a:defRPr>
+            <a:lvl4pPr algn="l">
+              <a:buNone/>
+              <a:defRPr sz="2700">
                 <a:latin typeface="HarmonyOS Sans SC"/>
                 <a:ea typeface="HarmonyOS Sans SC"/>
                 <a:cs typeface="HarmonyOS Sans SC"/>
               </a:defRPr>
             </a:lvl4pPr>
-            <a:lvl5pPr>
-              <a:buNone/>
-              <a:defRPr>
+            <a:lvl5pPr algn="l">
+              <a:buNone/>
+              <a:defRPr sz="2700">
                 <a:latin typeface="HarmonyOS Sans SC"/>
                 <a:ea typeface="HarmonyOS Sans SC"/>
                 <a:cs typeface="HarmonyOS Sans SC"/>
               </a:defRPr>
             </a:lvl5pPr>
-            <a:lvl6pPr>
-              <a:buNone/>
-              <a:defRPr>
+            <a:lvl6pPr algn="l">
+              <a:buNone/>
+              <a:defRPr sz="2700">
                 <a:latin typeface="HarmonyOS Sans SC"/>
                 <a:ea typeface="HarmonyOS Sans SC"/>
                 <a:cs typeface="HarmonyOS Sans SC"/>
               </a:defRPr>
             </a:lvl6pPr>
-            <a:lvl7pPr>
-              <a:buNone/>
-              <a:defRPr>
+            <a:lvl7pPr algn="l">
+              <a:buNone/>
+              <a:defRPr sz="2700">
                 <a:latin typeface="HarmonyOS Sans SC"/>
                 <a:ea typeface="HarmonyOS Sans SC"/>
                 <a:cs typeface="HarmonyOS Sans SC"/>
               </a:defRPr>
             </a:lvl7pPr>
-            <a:lvl8pPr>
-              <a:buNone/>
-              <a:defRPr>
+            <a:lvl8pPr algn="l">
+              <a:buNone/>
+              <a:defRPr sz="2700">
                 <a:latin typeface="HarmonyOS Sans SC"/>
                 <a:ea typeface="HarmonyOS Sans SC"/>
                 <a:cs typeface="HarmonyOS Sans SC"/>
               </a:defRPr>
             </a:lvl8pPr>
-            <a:lvl9pPr>
-              <a:buNone/>
-              <a:defRPr>
+            <a:lvl9pPr algn="l">
+              <a:buNone/>
+              <a:defRPr sz="2700">
                 <a:latin typeface="HarmonyOS Sans SC"/>
                 <a:ea typeface="HarmonyOS Sans SC"/>
                 <a:cs typeface="HarmonyOS Sans SC"/>
@@ -4649,19 +4649,19 @@
             </a:lvl9pPr>
           </a:lstStyle>
           <a:p xmlns:a="http://schemas.openxmlformats.org/drawingml/2006/main">
-            <a:pPr>
+            <a:pPr algn="l">
               <a:lnSpc>
                 <a:spcPct val="116000"/>
               </a:lnSpc>
               <a:buNone/>
-              <a:defRPr>
+              <a:defRPr sz="2700">
                 <a:latin typeface="HarmonyOS Sans SC"/>
                 <a:ea typeface="HarmonyOS Sans SC"/>
                 <a:cs typeface="HarmonyOS Sans SC"/>
               </a:defRPr>
             </a:pPr>
             <a:r>
-              <a:rPr sz="3150" b="1" u="none" strike="noStrike">
+              <a:rPr sz="2700" b="1" u="none" strike="noStrike">
                 <a:solidFill>
                   <a:srgbClr val="F7F7F2"/>
                 </a:solidFill>
@@ -4698,8 +4698,8 @@
         </p:nvSpPr>
         <p:spPr>
           <a:xfrm xmlns:a="http://schemas.openxmlformats.org/drawingml/2006/main">
-            <a:off x="628560" y="2876400"/>
-            <a:ext cx="2381040" cy="456840"/>
+            <a:off x="609600" y="3048000"/>
+            <a:ext cx="2571750" cy="457200"/>
           </a:xfrm>
           <a:prstGeom xmlns:a="http://schemas.openxmlformats.org/drawingml/2006/main" prst="rect">
             <a:avLst/>
@@ -4720,80 +4720,80 @@
             <a:noAutofit/>
           </a:bodyPr>
           <a:lstStyle xmlns:a="http://schemas.openxmlformats.org/drawingml/2006/main">
-            <a:defPPr>
-              <a:defRPr>
+            <a:defPPr algn="l">
+              <a:defRPr sz="2100">
                 <a:latin typeface="HarmonyOS Sans SC"/>
                 <a:ea typeface="HarmonyOS Sans SC"/>
                 <a:cs typeface="HarmonyOS Sans SC"/>
               </a:defRPr>
             </a:defPPr>
-            <a:lvl1pPr>
-              <a:buNone/>
-              <a:defRPr>
+            <a:lvl1pPr algn="l">
+              <a:buNone/>
+              <a:defRPr sz="2100">
                 <a:latin typeface="HarmonyOS Sans SC"/>
                 <a:ea typeface="HarmonyOS Sans SC"/>
                 <a:cs typeface="HarmonyOS Sans SC"/>
               </a:defRPr>
             </a:lvl1pPr>
-            <a:lvl2pPr>
-              <a:buNone/>
-              <a:defRPr>
+            <a:lvl2pPr algn="l">
+              <a:buNone/>
+              <a:defRPr sz="2100">
                 <a:latin typeface="HarmonyOS Sans SC"/>
                 <a:ea typeface="HarmonyOS Sans SC"/>
                 <a:cs typeface="HarmonyOS Sans SC"/>
               </a:defRPr>
             </a:lvl2pPr>
-            <a:lvl3pPr>
-              <a:buNone/>
-              <a:defRPr>
+            <a:lvl3pPr algn="l">
+              <a:buNone/>
+              <a:defRPr sz="2100">
                 <a:latin typeface="HarmonyOS Sans SC"/>
                 <a:ea typeface="HarmonyOS Sans SC"/>
                 <a:cs typeface="HarmonyOS Sans SC"/>
               </a:defRPr>
             </a:lvl3pPr>
-            <a:lvl4pPr>
-              <a:buNone/>
-              <a:defRPr>
+            <a:lvl4pPr algn="l">
+              <a:buNone/>
+              <a:defRPr sz="2100">
                 <a:latin typeface="HarmonyOS Sans SC"/>
                 <a:ea typeface="HarmonyOS Sans SC"/>
                 <a:cs typeface="HarmonyOS Sans SC"/>
               </a:defRPr>
             </a:lvl4pPr>
-            <a:lvl5pPr>
-              <a:buNone/>
-              <a:defRPr>
+            <a:lvl5pPr algn="l">
+              <a:buNone/>
+              <a:defRPr sz="2100">
                 <a:latin typeface="HarmonyOS Sans SC"/>
                 <a:ea typeface="HarmonyOS Sans SC"/>
                 <a:cs typeface="HarmonyOS Sans SC"/>
               </a:defRPr>
             </a:lvl5pPr>
-            <a:lvl6pPr>
-              <a:buNone/>
-              <a:defRPr>
+            <a:lvl6pPr algn="l">
+              <a:buNone/>
+              <a:defRPr sz="2100">
                 <a:latin typeface="HarmonyOS Sans SC"/>
                 <a:ea typeface="HarmonyOS Sans SC"/>
                 <a:cs typeface="HarmonyOS Sans SC"/>
               </a:defRPr>
             </a:lvl6pPr>
-            <a:lvl7pPr>
-              <a:buNone/>
-              <a:defRPr>
+            <a:lvl7pPr algn="l">
+              <a:buNone/>
+              <a:defRPr sz="2100">
                 <a:latin typeface="HarmonyOS Sans SC"/>
                 <a:ea typeface="HarmonyOS Sans SC"/>
                 <a:cs typeface="HarmonyOS Sans SC"/>
               </a:defRPr>
             </a:lvl7pPr>
-            <a:lvl8pPr>
-              <a:buNone/>
-              <a:defRPr>
+            <a:lvl8pPr algn="l">
+              <a:buNone/>
+              <a:defRPr sz="2100">
                 <a:latin typeface="HarmonyOS Sans SC"/>
                 <a:ea typeface="HarmonyOS Sans SC"/>
                 <a:cs typeface="HarmonyOS Sans SC"/>
               </a:defRPr>
             </a:lvl8pPr>
-            <a:lvl9pPr>
-              <a:buNone/>
-              <a:defRPr>
+            <a:lvl9pPr algn="l">
+              <a:buNone/>
+              <a:defRPr sz="2100">
                 <a:latin typeface="HarmonyOS Sans SC"/>
                 <a:ea typeface="HarmonyOS Sans SC"/>
                 <a:cs typeface="HarmonyOS Sans SC"/>
@@ -4801,19 +4801,19 @@
             </a:lvl9pPr>
           </a:lstStyle>
           <a:p xmlns:a="http://schemas.openxmlformats.org/drawingml/2006/main">
-            <a:pPr>
+            <a:pPr algn="l">
               <a:lnSpc>
                 <a:spcPct val="116000"/>
               </a:lnSpc>
               <a:buNone/>
-              <a:defRPr>
+              <a:defRPr sz="2100">
                 <a:latin typeface="HarmonyOS Sans SC"/>
                 <a:ea typeface="HarmonyOS Sans SC"/>
                 <a:cs typeface="HarmonyOS Sans SC"/>
               </a:defRPr>
             </a:pPr>
             <a:r>
-              <a:rPr sz="2550" b="1" u="none" strike="noStrike">
+              <a:rPr sz="2100" b="1" u="none" strike="noStrike">
                 <a:solidFill>
                   <a:srgbClr val="65E8D4"/>
                 </a:solidFill>
@@ -4850,8 +4850,8 @@
         </p:nvSpPr>
         <p:spPr>
           <a:xfrm xmlns:a="http://schemas.openxmlformats.org/drawingml/2006/main">
-            <a:off x="628560" y="3819600"/>
-            <a:ext cx="2381040" cy="456840"/>
+            <a:off x="609600" y="3962400"/>
+            <a:ext cx="2571750" cy="457200"/>
           </a:xfrm>
           <a:prstGeom xmlns:a="http://schemas.openxmlformats.org/drawingml/2006/main" prst="rect">
             <a:avLst/>
@@ -4872,80 +4872,80 @@
             <a:noAutofit/>
           </a:bodyPr>
           <a:lstStyle xmlns:a="http://schemas.openxmlformats.org/drawingml/2006/main">
-            <a:defPPr>
-              <a:defRPr>
+            <a:defPPr algn="l">
+              <a:defRPr sz="2100">
                 <a:latin typeface="HarmonyOS Sans SC"/>
                 <a:ea typeface="HarmonyOS Sans SC"/>
                 <a:cs typeface="HarmonyOS Sans SC"/>
               </a:defRPr>
             </a:defPPr>
-            <a:lvl1pPr>
-              <a:buNone/>
-              <a:defRPr>
+            <a:lvl1pPr algn="l">
+              <a:buNone/>
+              <a:defRPr sz="2100">
                 <a:latin typeface="HarmonyOS Sans SC"/>
                 <a:ea typeface="HarmonyOS Sans SC"/>
                 <a:cs typeface="HarmonyOS Sans SC"/>
               </a:defRPr>
             </a:lvl1pPr>
-            <a:lvl2pPr>
-              <a:buNone/>
-              <a:defRPr>
+            <a:lvl2pPr algn="l">
+              <a:buNone/>
+              <a:defRPr sz="2100">
                 <a:latin typeface="HarmonyOS Sans SC"/>
                 <a:ea typeface="HarmonyOS Sans SC"/>
                 <a:cs typeface="HarmonyOS Sans SC"/>
               </a:defRPr>
             </a:lvl2pPr>
-            <a:lvl3pPr>
-              <a:buNone/>
-              <a:defRPr>
+            <a:lvl3pPr algn="l">
+              <a:buNone/>
+              <a:defRPr sz="2100">
                 <a:latin typeface="HarmonyOS Sans SC"/>
                 <a:ea typeface="HarmonyOS Sans SC"/>
                 <a:cs typeface="HarmonyOS Sans SC"/>
               </a:defRPr>
             </a:lvl3pPr>
-            <a:lvl4pPr>
-              <a:buNone/>
-              <a:defRPr>
+            <a:lvl4pPr algn="l">
+              <a:buNone/>
+              <a:defRPr sz="2100">
                 <a:latin typeface="HarmonyOS Sans SC"/>
                 <a:ea typeface="HarmonyOS Sans SC"/>
                 <a:cs typeface="HarmonyOS Sans SC"/>
               </a:defRPr>
             </a:lvl4pPr>
-            <a:lvl5pPr>
-              <a:buNone/>
-              <a:defRPr>
+            <a:lvl5pPr algn="l">
+              <a:buNone/>
+              <a:defRPr sz="2100">
                 <a:latin typeface="HarmonyOS Sans SC"/>
                 <a:ea typeface="HarmonyOS Sans SC"/>
                 <a:cs typeface="HarmonyOS Sans SC"/>
               </a:defRPr>
             </a:lvl5pPr>
-            <a:lvl6pPr>
-              <a:buNone/>
-              <a:defRPr>
+            <a:lvl6pPr algn="l">
+              <a:buNone/>
+              <a:defRPr sz="2100">
                 <a:latin typeface="HarmonyOS Sans SC"/>
                 <a:ea typeface="HarmonyOS Sans SC"/>
                 <a:cs typeface="HarmonyOS Sans SC"/>
               </a:defRPr>
             </a:lvl6pPr>
-            <a:lvl7pPr>
-              <a:buNone/>
-              <a:defRPr>
+            <a:lvl7pPr algn="l">
+              <a:buNone/>
+              <a:defRPr sz="2100">
                 <a:latin typeface="HarmonyOS Sans SC"/>
                 <a:ea typeface="HarmonyOS Sans SC"/>
                 <a:cs typeface="HarmonyOS Sans SC"/>
               </a:defRPr>
             </a:lvl7pPr>
-            <a:lvl8pPr>
-              <a:buNone/>
-              <a:defRPr>
+            <a:lvl8pPr algn="l">
+              <a:buNone/>
+              <a:defRPr sz="2100">
                 <a:latin typeface="HarmonyOS Sans SC"/>
                 <a:ea typeface="HarmonyOS Sans SC"/>
                 <a:cs typeface="HarmonyOS Sans SC"/>
               </a:defRPr>
             </a:lvl8pPr>
-            <a:lvl9pPr>
-              <a:buNone/>
-              <a:defRPr>
+            <a:lvl9pPr algn="l">
+              <a:buNone/>
+              <a:defRPr sz="2100">
                 <a:latin typeface="HarmonyOS Sans SC"/>
                 <a:ea typeface="HarmonyOS Sans SC"/>
                 <a:cs typeface="HarmonyOS Sans SC"/>
@@ -4953,19 +4953,19 @@
             </a:lvl9pPr>
           </a:lstStyle>
           <a:p xmlns:a="http://schemas.openxmlformats.org/drawingml/2006/main">
-            <a:pPr>
+            <a:pPr algn="l">
               <a:lnSpc>
                 <a:spcPct val="116000"/>
               </a:lnSpc>
               <a:buNone/>
-              <a:defRPr>
+              <a:defRPr sz="2100">
                 <a:latin typeface="HarmonyOS Sans SC"/>
                 <a:ea typeface="HarmonyOS Sans SC"/>
                 <a:cs typeface="HarmonyOS Sans SC"/>
               </a:defRPr>
             </a:pPr>
             <a:r>
-              <a:rPr sz="2550" b="1" u="none" strike="noStrike">
+              <a:rPr sz="2100" b="1" u="none" strike="noStrike">
                 <a:solidFill>
                   <a:srgbClr val="65E8D4"/>
                 </a:solidFill>
@@ -5002,8 +5002,8 @@
         </p:nvSpPr>
         <p:spPr>
           <a:xfrm xmlns:a="http://schemas.openxmlformats.org/drawingml/2006/main">
-            <a:off x="628560" y="4762440"/>
-            <a:ext cx="2381040" cy="456840"/>
+            <a:off x="609600" y="4876800"/>
+            <a:ext cx="2571750" cy="457200"/>
           </a:xfrm>
           <a:prstGeom xmlns:a="http://schemas.openxmlformats.org/drawingml/2006/main" prst="rect">
             <a:avLst/>
@@ -5024,80 +5024,80 @@
             <a:noAutofit/>
           </a:bodyPr>
           <a:lstStyle xmlns:a="http://schemas.openxmlformats.org/drawingml/2006/main">
-            <a:defPPr>
-              <a:defRPr>
+            <a:defPPr algn="l">
+              <a:defRPr sz="2100">
                 <a:latin typeface="HarmonyOS Sans SC"/>
                 <a:ea typeface="HarmonyOS Sans SC"/>
                 <a:cs typeface="HarmonyOS Sans SC"/>
               </a:defRPr>
             </a:defPPr>
-            <a:lvl1pPr>
-              <a:buNone/>
-              <a:defRPr>
+            <a:lvl1pPr algn="l">
+              <a:buNone/>
+              <a:defRPr sz="2100">
                 <a:latin typeface="HarmonyOS Sans SC"/>
                 <a:ea typeface="HarmonyOS Sans SC"/>
                 <a:cs typeface="HarmonyOS Sans SC"/>
               </a:defRPr>
             </a:lvl1pPr>
-            <a:lvl2pPr>
-              <a:buNone/>
-              <a:defRPr>
+            <a:lvl2pPr algn="l">
+              <a:buNone/>
+              <a:defRPr sz="2100">
                 <a:latin typeface="HarmonyOS Sans SC"/>
                 <a:ea typeface="HarmonyOS Sans SC"/>
                 <a:cs typeface="HarmonyOS Sans SC"/>
               </a:defRPr>
             </a:lvl2pPr>
-            <a:lvl3pPr>
-              <a:buNone/>
-              <a:defRPr>
+            <a:lvl3pPr algn="l">
+              <a:buNone/>
+              <a:defRPr sz="2100">
                 <a:latin typeface="HarmonyOS Sans SC"/>
                 <a:ea typeface="HarmonyOS Sans SC"/>
                 <a:cs typeface="HarmonyOS Sans SC"/>
               </a:defRPr>
             </a:lvl3pPr>
-            <a:lvl4pPr>
-              <a:buNone/>
-              <a:defRPr>
+            <a:lvl4pPr algn="l">
+              <a:buNone/>
+              <a:defRPr sz="2100">
                 <a:latin typeface="HarmonyOS Sans SC"/>
                 <a:ea typeface="HarmonyOS Sans SC"/>
                 <a:cs typeface="HarmonyOS Sans SC"/>
               </a:defRPr>
             </a:lvl4pPr>
-            <a:lvl5pPr>
-              <a:buNone/>
-              <a:defRPr>
+            <a:lvl5pPr algn="l">
+              <a:buNone/>
+              <a:defRPr sz="2100">
                 <a:latin typeface="HarmonyOS Sans SC"/>
                 <a:ea typeface="HarmonyOS Sans SC"/>
                 <a:cs typeface="HarmonyOS Sans SC"/>
               </a:defRPr>
             </a:lvl5pPr>
-            <a:lvl6pPr>
-              <a:buNone/>
-              <a:defRPr>
+            <a:lvl6pPr algn="l">
+              <a:buNone/>
+              <a:defRPr sz="2100">
                 <a:latin typeface="HarmonyOS Sans SC"/>
                 <a:ea typeface="HarmonyOS Sans SC"/>
                 <a:cs typeface="HarmonyOS Sans SC"/>
               </a:defRPr>
             </a:lvl6pPr>
-            <a:lvl7pPr>
-              <a:buNone/>
-              <a:defRPr>
+            <a:lvl7pPr algn="l">
+              <a:buNone/>
+              <a:defRPr sz="2100">
                 <a:latin typeface="HarmonyOS Sans SC"/>
                 <a:ea typeface="HarmonyOS Sans SC"/>
                 <a:cs typeface="HarmonyOS Sans SC"/>
               </a:defRPr>
             </a:lvl7pPr>
-            <a:lvl8pPr>
-              <a:buNone/>
-              <a:defRPr>
+            <a:lvl8pPr algn="l">
+              <a:buNone/>
+              <a:defRPr sz="2100">
                 <a:latin typeface="HarmonyOS Sans SC"/>
                 <a:ea typeface="HarmonyOS Sans SC"/>
                 <a:cs typeface="HarmonyOS Sans SC"/>
               </a:defRPr>
             </a:lvl8pPr>
-            <a:lvl9pPr>
-              <a:buNone/>
-              <a:defRPr>
+            <a:lvl9pPr algn="l">
+              <a:buNone/>
+              <a:defRPr sz="2100">
                 <a:latin typeface="HarmonyOS Sans SC"/>
                 <a:ea typeface="HarmonyOS Sans SC"/>
                 <a:cs typeface="HarmonyOS Sans SC"/>
@@ -5105,19 +5105,19 @@
             </a:lvl9pPr>
           </a:lstStyle>
           <a:p xmlns:a="http://schemas.openxmlformats.org/drawingml/2006/main">
-            <a:pPr>
+            <a:pPr algn="l">
               <a:lnSpc>
                 <a:spcPct val="116000"/>
               </a:lnSpc>
               <a:buNone/>
-              <a:defRPr>
+              <a:defRPr sz="2100">
                 <a:latin typeface="HarmonyOS Sans SC"/>
                 <a:ea typeface="HarmonyOS Sans SC"/>
                 <a:cs typeface="HarmonyOS Sans SC"/>
               </a:defRPr>
             </a:pPr>
             <a:r>
-              <a:rPr sz="2550" b="1" u="none" strike="noStrike">
+              <a:rPr sz="2100" b="1" u="none" strike="noStrike">
                 <a:solidFill>
                   <a:srgbClr val="65E8D4"/>
                 </a:solidFill>
@@ -5154,8 +5154,8 @@
         </p:nvSpPr>
         <p:spPr>
           <a:xfrm xmlns:a="http://schemas.openxmlformats.org/drawingml/2006/main">
-            <a:off x="3276720" y="2895480"/>
-            <a:ext cx="7943400" cy="437760"/>
+            <a:off x="4343400" y="3048000"/>
+            <a:ext cx="7239000" cy="533400"/>
           </a:xfrm>
           <a:prstGeom xmlns:a="http://schemas.openxmlformats.org/drawingml/2006/main" prst="rect">
             <a:avLst/>
@@ -5176,80 +5176,80 @@
             <a:noAutofit/>
           </a:bodyPr>
           <a:lstStyle xmlns:a="http://schemas.openxmlformats.org/drawingml/2006/main">
-            <a:defPPr>
-              <a:defRPr>
+            <a:defPPr algn="l">
+              <a:defRPr sz="2100">
                 <a:latin typeface="HarmonyOS Sans SC"/>
                 <a:ea typeface="HarmonyOS Sans SC"/>
                 <a:cs typeface="HarmonyOS Sans SC"/>
               </a:defRPr>
             </a:defPPr>
-            <a:lvl1pPr>
-              <a:buNone/>
-              <a:defRPr>
+            <a:lvl1pPr algn="l">
+              <a:buNone/>
+              <a:defRPr sz="2100">
                 <a:latin typeface="HarmonyOS Sans SC"/>
                 <a:ea typeface="HarmonyOS Sans SC"/>
                 <a:cs typeface="HarmonyOS Sans SC"/>
               </a:defRPr>
             </a:lvl1pPr>
-            <a:lvl2pPr>
-              <a:buNone/>
-              <a:defRPr>
+            <a:lvl2pPr algn="l">
+              <a:buNone/>
+              <a:defRPr sz="2100">
                 <a:latin typeface="HarmonyOS Sans SC"/>
                 <a:ea typeface="HarmonyOS Sans SC"/>
                 <a:cs typeface="HarmonyOS Sans SC"/>
               </a:defRPr>
             </a:lvl2pPr>
-            <a:lvl3pPr>
-              <a:buNone/>
-              <a:defRPr>
+            <a:lvl3pPr algn="l">
+              <a:buNone/>
+              <a:defRPr sz="2100">
                 <a:latin typeface="HarmonyOS Sans SC"/>
                 <a:ea typeface="HarmonyOS Sans SC"/>
                 <a:cs typeface="HarmonyOS Sans SC"/>
               </a:defRPr>
             </a:lvl3pPr>
-            <a:lvl4pPr>
-              <a:buNone/>
-              <a:defRPr>
+            <a:lvl4pPr algn="l">
+              <a:buNone/>
+              <a:defRPr sz="2100">
                 <a:latin typeface="HarmonyOS Sans SC"/>
                 <a:ea typeface="HarmonyOS Sans SC"/>
                 <a:cs typeface="HarmonyOS Sans SC"/>
               </a:defRPr>
             </a:lvl4pPr>
-            <a:lvl5pPr>
-              <a:buNone/>
-              <a:defRPr>
+            <a:lvl5pPr algn="l">
+              <a:buNone/>
+              <a:defRPr sz="2100">
                 <a:latin typeface="HarmonyOS Sans SC"/>
                 <a:ea typeface="HarmonyOS Sans SC"/>
                 <a:cs typeface="HarmonyOS Sans SC"/>
               </a:defRPr>
             </a:lvl5pPr>
-            <a:lvl6pPr>
-              <a:buNone/>
-              <a:defRPr>
+            <a:lvl6pPr algn="l">
+              <a:buNone/>
+              <a:defRPr sz="2100">
                 <a:latin typeface="HarmonyOS Sans SC"/>
                 <a:ea typeface="HarmonyOS Sans SC"/>
                 <a:cs typeface="HarmonyOS Sans SC"/>
               </a:defRPr>
             </a:lvl6pPr>
-            <a:lvl7pPr>
-              <a:buNone/>
-              <a:defRPr>
+            <a:lvl7pPr algn="l">
+              <a:buNone/>
+              <a:defRPr sz="2100">
                 <a:latin typeface="HarmonyOS Sans SC"/>
                 <a:ea typeface="HarmonyOS Sans SC"/>
                 <a:cs typeface="HarmonyOS Sans SC"/>
               </a:defRPr>
             </a:lvl7pPr>
-            <a:lvl8pPr>
-              <a:buNone/>
-              <a:defRPr>
+            <a:lvl8pPr algn="l">
+              <a:buNone/>
+              <a:defRPr sz="2100">
                 <a:latin typeface="HarmonyOS Sans SC"/>
                 <a:ea typeface="HarmonyOS Sans SC"/>
                 <a:cs typeface="HarmonyOS Sans SC"/>
               </a:defRPr>
             </a:lvl8pPr>
-            <a:lvl9pPr>
-              <a:buNone/>
-              <a:defRPr>
+            <a:lvl9pPr algn="l">
+              <a:buNone/>
+              <a:defRPr sz="2100">
                 <a:latin typeface="HarmonyOS Sans SC"/>
                 <a:ea typeface="HarmonyOS Sans SC"/>
                 <a:cs typeface="HarmonyOS Sans SC"/>
@@ -5257,19 +5257,19 @@
             </a:lvl9pPr>
           </a:lstStyle>
           <a:p xmlns:a="http://schemas.openxmlformats.org/drawingml/2006/main">
-            <a:pPr>
+            <a:pPr algn="l">
               <a:lnSpc>
                 <a:spcPct val="116000"/>
               </a:lnSpc>
               <a:buNone/>
-              <a:defRPr>
+              <a:defRPr sz="2100">
                 <a:latin typeface="HarmonyOS Sans SC"/>
                 <a:ea typeface="HarmonyOS Sans SC"/>
                 <a:cs typeface="HarmonyOS Sans SC"/>
               </a:defRPr>
             </a:pPr>
             <a:r>
-              <a:rPr sz="2250" b="0" u="none" strike="noStrike">
+              <a:rPr sz="2100" b="0" u="none" strike="noStrike">
                 <a:solidFill>
                   <a:srgbClr val="F7F7F2"/>
                 </a:solidFill>
@@ -5280,7 +5280,7 @@
               <a:t>Mystrix </a:t>
             </a:r>
             <a:r>
-              <a:rPr sz="2250" b="0" u="none" strike="noStrike">
+              <a:rPr sz="2100" b="0" u="none" strike="noStrike">
                 <a:solidFill>
                   <a:srgbClr val="F7F7F2"/>
                 </a:solidFill>
@@ -5317,8 +5317,8 @@
         </p:nvSpPr>
         <p:spPr>
           <a:xfrm xmlns:a="http://schemas.openxmlformats.org/drawingml/2006/main">
-            <a:off x="3276720" y="3838680"/>
-            <a:ext cx="7943400" cy="437760"/>
+            <a:off x="4343400" y="3962400"/>
+            <a:ext cx="7239000" cy="533400"/>
           </a:xfrm>
           <a:prstGeom xmlns:a="http://schemas.openxmlformats.org/drawingml/2006/main" prst="rect">
             <a:avLst/>
@@ -5339,80 +5339,80 @@
             <a:noAutofit/>
           </a:bodyPr>
           <a:lstStyle xmlns:a="http://schemas.openxmlformats.org/drawingml/2006/main">
-            <a:defPPr>
-              <a:defRPr>
+            <a:defPPr algn="l">
+              <a:defRPr sz="2100">
                 <a:latin typeface="HarmonyOS Sans SC"/>
                 <a:ea typeface="HarmonyOS Sans SC"/>
                 <a:cs typeface="HarmonyOS Sans SC"/>
               </a:defRPr>
             </a:defPPr>
-            <a:lvl1pPr>
-              <a:buNone/>
-              <a:defRPr>
+            <a:lvl1pPr algn="l">
+              <a:buNone/>
+              <a:defRPr sz="2100">
                 <a:latin typeface="HarmonyOS Sans SC"/>
                 <a:ea typeface="HarmonyOS Sans SC"/>
                 <a:cs typeface="HarmonyOS Sans SC"/>
               </a:defRPr>
             </a:lvl1pPr>
-            <a:lvl2pPr>
-              <a:buNone/>
-              <a:defRPr>
+            <a:lvl2pPr algn="l">
+              <a:buNone/>
+              <a:defRPr sz="2100">
                 <a:latin typeface="HarmonyOS Sans SC"/>
                 <a:ea typeface="HarmonyOS Sans SC"/>
                 <a:cs typeface="HarmonyOS Sans SC"/>
               </a:defRPr>
             </a:lvl2pPr>
-            <a:lvl3pPr>
-              <a:buNone/>
-              <a:defRPr>
+            <a:lvl3pPr algn="l">
+              <a:buNone/>
+              <a:defRPr sz="2100">
                 <a:latin typeface="HarmonyOS Sans SC"/>
                 <a:ea typeface="HarmonyOS Sans SC"/>
                 <a:cs typeface="HarmonyOS Sans SC"/>
               </a:defRPr>
             </a:lvl3pPr>
-            <a:lvl4pPr>
-              <a:buNone/>
-              <a:defRPr>
+            <a:lvl4pPr algn="l">
+              <a:buNone/>
+              <a:defRPr sz="2100">
                 <a:latin typeface="HarmonyOS Sans SC"/>
                 <a:ea typeface="HarmonyOS Sans SC"/>
                 <a:cs typeface="HarmonyOS Sans SC"/>
               </a:defRPr>
             </a:lvl4pPr>
-            <a:lvl5pPr>
-              <a:buNone/>
-              <a:defRPr>
+            <a:lvl5pPr algn="l">
+              <a:buNone/>
+              <a:defRPr sz="2100">
                 <a:latin typeface="HarmonyOS Sans SC"/>
                 <a:ea typeface="HarmonyOS Sans SC"/>
                 <a:cs typeface="HarmonyOS Sans SC"/>
               </a:defRPr>
             </a:lvl5pPr>
-            <a:lvl6pPr>
-              <a:buNone/>
-              <a:defRPr>
+            <a:lvl6pPr algn="l">
+              <a:buNone/>
+              <a:defRPr sz="2100">
                 <a:latin typeface="HarmonyOS Sans SC"/>
                 <a:ea typeface="HarmonyOS Sans SC"/>
                 <a:cs typeface="HarmonyOS Sans SC"/>
               </a:defRPr>
             </a:lvl6pPr>
-            <a:lvl7pPr>
-              <a:buNone/>
-              <a:defRPr>
+            <a:lvl7pPr algn="l">
+              <a:buNone/>
+              <a:defRPr sz="2100">
                 <a:latin typeface="HarmonyOS Sans SC"/>
                 <a:ea typeface="HarmonyOS Sans SC"/>
                 <a:cs typeface="HarmonyOS Sans SC"/>
               </a:defRPr>
             </a:lvl7pPr>
-            <a:lvl8pPr>
-              <a:buNone/>
-              <a:defRPr>
+            <a:lvl8pPr algn="l">
+              <a:buNone/>
+              <a:defRPr sz="2100">
                 <a:latin typeface="HarmonyOS Sans SC"/>
                 <a:ea typeface="HarmonyOS Sans SC"/>
                 <a:cs typeface="HarmonyOS Sans SC"/>
               </a:defRPr>
             </a:lvl8pPr>
-            <a:lvl9pPr>
-              <a:buNone/>
-              <a:defRPr>
+            <a:lvl9pPr algn="l">
+              <a:buNone/>
+              <a:defRPr sz="2100">
                 <a:latin typeface="HarmonyOS Sans SC"/>
                 <a:ea typeface="HarmonyOS Sans SC"/>
                 <a:cs typeface="HarmonyOS Sans SC"/>
@@ -5420,19 +5420,19 @@
             </a:lvl9pPr>
           </a:lstStyle>
           <a:p xmlns:a="http://schemas.openxmlformats.org/drawingml/2006/main">
-            <a:pPr>
+            <a:pPr algn="l">
               <a:lnSpc>
                 <a:spcPct val="116000"/>
               </a:lnSpc>
               <a:buNone/>
-              <a:defRPr>
+              <a:defRPr sz="2100">
                 <a:latin typeface="HarmonyOS Sans SC"/>
                 <a:ea typeface="HarmonyOS Sans SC"/>
                 <a:cs typeface="HarmonyOS Sans SC"/>
               </a:defRPr>
             </a:pPr>
             <a:r>
-              <a:rPr sz="2250" b="0" u="none" strike="noStrike">
+              <a:rPr sz="2100" b="0" u="none" strike="noStrike">
                 <a:solidFill>
                   <a:srgbClr val="F7F7F2"/>
                 </a:solidFill>
@@ -5443,7 +5443,7 @@
               <a:t>公开 </a:t>
             </a:r>
             <a:r>
-              <a:rPr sz="2250" b="0" u="none" strike="noStrike">
+              <a:rPr sz="2100" b="0" u="none" strike="noStrike">
                 <a:solidFill>
                   <a:srgbClr val="F7F7F2"/>
                 </a:solidFill>
@@ -5454,7 +5454,7 @@
               <a:t>API</a:t>
             </a:r>
             <a:r>
-              <a:rPr sz="2250" b="0" u="none" strike="noStrike">
+              <a:rPr sz="2100" b="0" u="none" strike="noStrike">
                 <a:solidFill>
                   <a:srgbClr val="F7F7F2"/>
                 </a:solidFill>
@@ -5465,7 +5465,7 @@
               <a:t>、</a:t>
             </a:r>
             <a:r>
-              <a:rPr sz="2250" b="0" u="none" strike="noStrike">
+              <a:rPr sz="2100" b="0" u="none" strike="noStrike">
                 <a:solidFill>
                   <a:srgbClr val="F7F7F2"/>
                 </a:solidFill>
@@ -5476,7 +5476,7 @@
               <a:t>Python </a:t>
             </a:r>
             <a:r>
-              <a:rPr sz="2250" b="0" u="none" strike="noStrike">
+              <a:rPr sz="2100" b="0" u="none" strike="noStrike">
                 <a:solidFill>
                   <a:srgbClr val="F7F7F2"/>
                 </a:solidFill>
@@ -5487,7 +5487,7 @@
               <a:t>与 </a:t>
             </a:r>
             <a:r>
-              <a:rPr sz="2250" b="0" u="none" strike="noStrike">
+              <a:rPr sz="2100" b="0" u="none" strike="noStrike">
                 <a:solidFill>
                   <a:srgbClr val="F7F7F2"/>
                 </a:solidFill>
@@ -5498,7 +5498,7 @@
               <a:t>C++ </a:t>
             </a:r>
             <a:r>
-              <a:rPr sz="2250" b="0" u="none" strike="noStrike">
+              <a:rPr sz="2100" b="0" u="none" strike="noStrike">
                 <a:solidFill>
                   <a:srgbClr val="F7F7F2"/>
                 </a:solidFill>
@@ -5535,8 +5535,8 @@
         </p:nvSpPr>
         <p:spPr>
           <a:xfrm xmlns:a="http://schemas.openxmlformats.org/drawingml/2006/main">
-            <a:off x="3276720" y="4781520"/>
-            <a:ext cx="7943400" cy="437760"/>
+            <a:off x="4343400" y="4876800"/>
+            <a:ext cx="7239000" cy="533400"/>
           </a:xfrm>
           <a:prstGeom xmlns:a="http://schemas.openxmlformats.org/drawingml/2006/main" prst="rect">
             <a:avLst/>
@@ -5557,80 +5557,80 @@
             <a:noAutofit/>
           </a:bodyPr>
           <a:lstStyle xmlns:a="http://schemas.openxmlformats.org/drawingml/2006/main">
-            <a:defPPr>
-              <a:defRPr>
+            <a:defPPr algn="l">
+              <a:defRPr sz="2100">
                 <a:latin typeface="HarmonyOS Sans SC"/>
                 <a:ea typeface="HarmonyOS Sans SC"/>
                 <a:cs typeface="HarmonyOS Sans SC"/>
               </a:defRPr>
             </a:defPPr>
-            <a:lvl1pPr>
-              <a:buNone/>
-              <a:defRPr>
+            <a:lvl1pPr algn="l">
+              <a:buNone/>
+              <a:defRPr sz="2100">
                 <a:latin typeface="HarmonyOS Sans SC"/>
                 <a:ea typeface="HarmonyOS Sans SC"/>
                 <a:cs typeface="HarmonyOS Sans SC"/>
               </a:defRPr>
             </a:lvl1pPr>
-            <a:lvl2pPr>
-              <a:buNone/>
-              <a:defRPr>
+            <a:lvl2pPr algn="l">
+              <a:buNone/>
+              <a:defRPr sz="2100">
                 <a:latin typeface="HarmonyOS Sans SC"/>
                 <a:ea typeface="HarmonyOS Sans SC"/>
                 <a:cs typeface="HarmonyOS Sans SC"/>
               </a:defRPr>
             </a:lvl2pPr>
-            <a:lvl3pPr>
-              <a:buNone/>
-              <a:defRPr>
+            <a:lvl3pPr algn="l">
+              <a:buNone/>
+              <a:defRPr sz="2100">
                 <a:latin typeface="HarmonyOS Sans SC"/>
                 <a:ea typeface="HarmonyOS Sans SC"/>
                 <a:cs typeface="HarmonyOS Sans SC"/>
               </a:defRPr>
             </a:lvl3pPr>
-            <a:lvl4pPr>
-              <a:buNone/>
-              <a:defRPr>
+            <a:lvl4pPr algn="l">
+              <a:buNone/>
+              <a:defRPr sz="2100">
                 <a:latin typeface="HarmonyOS Sans SC"/>
                 <a:ea typeface="HarmonyOS Sans SC"/>
                 <a:cs typeface="HarmonyOS Sans SC"/>
               </a:defRPr>
             </a:lvl4pPr>
-            <a:lvl5pPr>
-              <a:buNone/>
-              <a:defRPr>
+            <a:lvl5pPr algn="l">
+              <a:buNone/>
+              <a:defRPr sz="2100">
                 <a:latin typeface="HarmonyOS Sans SC"/>
                 <a:ea typeface="HarmonyOS Sans SC"/>
                 <a:cs typeface="HarmonyOS Sans SC"/>
               </a:defRPr>
             </a:lvl5pPr>
-            <a:lvl6pPr>
-              <a:buNone/>
-              <a:defRPr>
+            <a:lvl6pPr algn="l">
+              <a:buNone/>
+              <a:defRPr sz="2100">
                 <a:latin typeface="HarmonyOS Sans SC"/>
                 <a:ea typeface="HarmonyOS Sans SC"/>
                 <a:cs typeface="HarmonyOS Sans SC"/>
               </a:defRPr>
             </a:lvl6pPr>
-            <a:lvl7pPr>
-              <a:buNone/>
-              <a:defRPr>
+            <a:lvl7pPr algn="l">
+              <a:buNone/>
+              <a:defRPr sz="2100">
                 <a:latin typeface="HarmonyOS Sans SC"/>
                 <a:ea typeface="HarmonyOS Sans SC"/>
                 <a:cs typeface="HarmonyOS Sans SC"/>
               </a:defRPr>
             </a:lvl7pPr>
-            <a:lvl8pPr>
-              <a:buNone/>
-              <a:defRPr>
+            <a:lvl8pPr algn="l">
+              <a:buNone/>
+              <a:defRPr sz="2100">
                 <a:latin typeface="HarmonyOS Sans SC"/>
                 <a:ea typeface="HarmonyOS Sans SC"/>
                 <a:cs typeface="HarmonyOS Sans SC"/>
               </a:defRPr>
             </a:lvl8pPr>
-            <a:lvl9pPr>
-              <a:buNone/>
-              <a:defRPr>
+            <a:lvl9pPr algn="l">
+              <a:buNone/>
+              <a:defRPr sz="2100">
                 <a:latin typeface="HarmonyOS Sans SC"/>
                 <a:ea typeface="HarmonyOS Sans SC"/>
                 <a:cs typeface="HarmonyOS Sans SC"/>
@@ -5638,19 +5638,19 @@
             </a:lvl9pPr>
           </a:lstStyle>
           <a:p xmlns:a="http://schemas.openxmlformats.org/drawingml/2006/main">
-            <a:pPr>
+            <a:pPr algn="l">
               <a:lnSpc>
                 <a:spcPct val="116000"/>
               </a:lnSpc>
               <a:buNone/>
-              <a:defRPr>
+              <a:defRPr sz="2100">
                 <a:latin typeface="HarmonyOS Sans SC"/>
                 <a:ea typeface="HarmonyOS Sans SC"/>
                 <a:cs typeface="HarmonyOS Sans SC"/>
               </a:defRPr>
             </a:pPr>
             <a:r>
-              <a:rPr sz="2250" b="0" u="none" strike="noStrike">
+              <a:rPr sz="2100" b="0" u="none" strike="noStrike">
                 <a:solidFill>
                   <a:srgbClr val="F7F7F2"/>
                 </a:solidFill>
@@ -5687,8 +5687,8 @@
         </p:nvSpPr>
         <p:spPr>
           <a:xfrm xmlns:a="http://schemas.openxmlformats.org/drawingml/2006/main">
-            <a:off x="628560" y="5877000"/>
-            <a:ext cx="10477080" cy="418680"/>
+            <a:off x="609600" y="5791200"/>
+            <a:ext cx="10972800" cy="457200"/>
           </a:xfrm>
           <a:prstGeom xmlns:a="http://schemas.openxmlformats.org/drawingml/2006/main" prst="rect">
             <a:avLst/>
@@ -5709,80 +5709,80 @@
             <a:noAutofit/>
           </a:bodyPr>
           <a:lstStyle xmlns:a="http://schemas.openxmlformats.org/drawingml/2006/main">
-            <a:defPPr>
-              <a:defRPr>
+            <a:defPPr algn="l">
+              <a:defRPr sz="1800">
                 <a:latin typeface="HarmonyOS Sans SC"/>
                 <a:ea typeface="HarmonyOS Sans SC"/>
                 <a:cs typeface="HarmonyOS Sans SC"/>
               </a:defRPr>
             </a:defPPr>
-            <a:lvl1pPr>
-              <a:buNone/>
-              <a:defRPr>
+            <a:lvl1pPr algn="l">
+              <a:buNone/>
+              <a:defRPr sz="1800">
                 <a:latin typeface="HarmonyOS Sans SC"/>
                 <a:ea typeface="HarmonyOS Sans SC"/>
                 <a:cs typeface="HarmonyOS Sans SC"/>
               </a:defRPr>
             </a:lvl1pPr>
-            <a:lvl2pPr>
-              <a:buNone/>
-              <a:defRPr>
+            <a:lvl2pPr algn="l">
+              <a:buNone/>
+              <a:defRPr sz="1800">
                 <a:latin typeface="HarmonyOS Sans SC"/>
                 <a:ea typeface="HarmonyOS Sans SC"/>
                 <a:cs typeface="HarmonyOS Sans SC"/>
               </a:defRPr>
             </a:lvl2pPr>
-            <a:lvl3pPr>
-              <a:buNone/>
-              <a:defRPr>
+            <a:lvl3pPr algn="l">
+              <a:buNone/>
+              <a:defRPr sz="1800">
                 <a:latin typeface="HarmonyOS Sans SC"/>
                 <a:ea typeface="HarmonyOS Sans SC"/>
                 <a:cs typeface="HarmonyOS Sans SC"/>
               </a:defRPr>
             </a:lvl3pPr>
-            <a:lvl4pPr>
-              <a:buNone/>
-              <a:defRPr>
+            <a:lvl4pPr algn="l">
+              <a:buNone/>
+              <a:defRPr sz="1800">
                 <a:latin typeface="HarmonyOS Sans SC"/>
                 <a:ea typeface="HarmonyOS Sans SC"/>
                 <a:cs typeface="HarmonyOS Sans SC"/>
               </a:defRPr>
             </a:lvl4pPr>
-            <a:lvl5pPr>
-              <a:buNone/>
-              <a:defRPr>
+            <a:lvl5pPr algn="l">
+              <a:buNone/>
+              <a:defRPr sz="1800">
                 <a:latin typeface="HarmonyOS Sans SC"/>
                 <a:ea typeface="HarmonyOS Sans SC"/>
                 <a:cs typeface="HarmonyOS Sans SC"/>
               </a:defRPr>
             </a:lvl5pPr>
-            <a:lvl6pPr>
-              <a:buNone/>
-              <a:defRPr>
+            <a:lvl6pPr algn="l">
+              <a:buNone/>
+              <a:defRPr sz="1800">
                 <a:latin typeface="HarmonyOS Sans SC"/>
                 <a:ea typeface="HarmonyOS Sans SC"/>
                 <a:cs typeface="HarmonyOS Sans SC"/>
               </a:defRPr>
             </a:lvl6pPr>
-            <a:lvl7pPr>
-              <a:buNone/>
-              <a:defRPr>
+            <a:lvl7pPr algn="l">
+              <a:buNone/>
+              <a:defRPr sz="1800">
                 <a:latin typeface="HarmonyOS Sans SC"/>
                 <a:ea typeface="HarmonyOS Sans SC"/>
                 <a:cs typeface="HarmonyOS Sans SC"/>
               </a:defRPr>
             </a:lvl7pPr>
-            <a:lvl8pPr>
-              <a:buNone/>
-              <a:defRPr>
+            <a:lvl8pPr algn="l">
+              <a:buNone/>
+              <a:defRPr sz="1800">
                 <a:latin typeface="HarmonyOS Sans SC"/>
                 <a:ea typeface="HarmonyOS Sans SC"/>
                 <a:cs typeface="HarmonyOS Sans SC"/>
               </a:defRPr>
             </a:lvl8pPr>
-            <a:lvl9pPr>
-              <a:buNone/>
-              <a:defRPr>
+            <a:lvl9pPr algn="l">
+              <a:buNone/>
+              <a:defRPr sz="1800">
                 <a:latin typeface="HarmonyOS Sans SC"/>
                 <a:ea typeface="HarmonyOS Sans SC"/>
                 <a:cs typeface="HarmonyOS Sans SC"/>
@@ -5790,19 +5790,19 @@
             </a:lvl9pPr>
           </a:lstStyle>
           <a:p xmlns:a="http://schemas.openxmlformats.org/drawingml/2006/main">
-            <a:pPr>
+            <a:pPr algn="l">
               <a:lnSpc>
                 <a:spcPct val="116000"/>
               </a:lnSpc>
               <a:buNone/>
-              <a:defRPr>
+              <a:defRPr sz="1800">
                 <a:latin typeface="HarmonyOS Sans SC"/>
                 <a:ea typeface="HarmonyOS Sans SC"/>
                 <a:cs typeface="HarmonyOS Sans SC"/>
               </a:defRPr>
             </a:pPr>
             <a:r>
-              <a:rPr sz="2100" b="0" u="none" strike="noStrike">
+              <a:rPr sz="1800" b="0" u="none" strike="noStrike">
                 <a:solidFill>
                   <a:srgbClr val="A6A7B2"/>
                 </a:solidFill>
@@ -5849,7 +5849,7 @@
         </p:blipFill>
         <p:spPr>
           <a:xfrm xmlns:a="http://schemas.openxmlformats.org/drawingml/2006/main">
-            <a:off x="609600" y="6524625"/>
+            <a:off x="609600" y="6400800"/>
             <a:ext cx="1952625" cy="228220"/>
           </a:xfrm>
           <a:prstGeom xmlns:a="http://schemas.openxmlformats.org/drawingml/2006/main" prst="rect">
@@ -5873,8 +5873,8 @@
         </p:nvSpPr>
         <p:spPr>
           <a:xfrm xmlns:a="http://schemas.openxmlformats.org/drawingml/2006/main">
-            <a:off x="11191875" y="6505575"/>
-            <a:ext cx="419100" cy="247650"/>
+            <a:off x="11163300" y="6400800"/>
+            <a:ext cx="419100" cy="228600"/>
           </a:xfrm>
           <a:prstGeom xmlns:a="http://schemas.openxmlformats.org/drawingml/2006/main" prst="rect">
             <a:avLst/>
@@ -5885,7 +5885,7 @@
           </a:ln>
         </p:spPr>
         <p:txBody>
-          <a:bodyPr xmlns:a="http://schemas.openxmlformats.org/drawingml/2006/main" wrap="none" lIns="0" tIns="0" rIns="0" bIns="0" anchor="ctr">
+          <a:bodyPr xmlns:a="http://schemas.openxmlformats.org/drawingml/2006/main" wrap="none" lIns="0" tIns="0" rIns="0" bIns="0" anchor="t">
             <a:noAutofit/>
           </a:bodyPr>
           <a:lstStyle xmlns:a="http://schemas.openxmlformats.org/drawingml/2006/main">
